--- a/tests/golden/visual/composition/v19_site_context_analysis/deck.pptx
+++ b/tests/golden/visual/composition/v19_site_context_analysis/deck.pptx
@@ -949,7 +949,7 @@
         <p:spPr>
           <a:xfrm>
             <a:off x="640080" y="1088898"/>
-            <a:ext cx="4241292" cy="3067050"/>
+            <a:ext cx="4241292" cy="3204210"/>
           </a:xfrm>
           <a:prstGeom prst="rect">
             <a:avLst/>
@@ -973,7 +973,7 @@
         </p:nvSpPr>
         <p:spPr>
           <a:xfrm>
-            <a:off x="777240" y="2439543"/>
+            <a:off x="777240" y="2508123"/>
             <a:ext cx="3966972" cy="365760"/>
           </a:xfrm>
           <a:prstGeom prst="rect">
@@ -1180,7 +1180,7 @@
         </p:nvSpPr>
         <p:spPr>
           <a:xfrm>
-            <a:off x="5033772" y="3520440"/>
+            <a:off x="5033772" y="3657600"/>
             <a:ext cx="3470148" cy="635508"/>
           </a:xfrm>
           <a:prstGeom prst="rect">
